--- a/apps/resources/bundled_files/3-klass-sandyn-bolugu-sabak.pptx
+++ b/apps/resources/bundled_files/3-klass-sandyn-bolugu-sabak.pptx
@@ -5196,7 +5196,7 @@
                 </a:solidFill>
                 <a:latin typeface="PT Sans"/>
               </a:rPr>
-              <a:t>3-класс · Математика</a:t>
+              <a:t/>
             </a:r>
           </a:p>
         </p:txBody>
@@ -5688,7 +5688,7 @@
                 </a:solidFill>
                 <a:latin typeface="PT Sans"/>
               </a:rPr>
-              <a:t>3-класс ›</a:t>
+              <a:t/>
             </a:r>
           </a:p>
           <a:p>
@@ -6605,7 +6605,7 @@
                 </a:solidFill>
                 <a:latin typeface="PT Sans"/>
               </a:rPr>
-              <a:t>3-класс ›</a:t>
+              <a:t/>
             </a:r>
           </a:p>
           <a:p>
@@ -9145,7 +9145,7 @@
                 </a:solidFill>
                 <a:latin typeface="PT Sans"/>
               </a:rPr>
-              <a:t>3-класс ›</a:t>
+              <a:t/>
             </a:r>
           </a:p>
           <a:p>
@@ -11692,7 +11692,7 @@
                 </a:solidFill>
                 <a:latin typeface="PT Sans"/>
               </a:rPr>
-              <a:t>3-класс ›</a:t>
+              <a:t/>
             </a:r>
           </a:p>
           <a:p>
@@ -13022,7 +13022,7 @@
                 </a:solidFill>
                 <a:latin typeface="PT Sans"/>
               </a:rPr>
-              <a:t>3-класс ›</a:t>
+              <a:t/>
             </a:r>
           </a:p>
           <a:p>
@@ -13773,7 +13773,7 @@
                 </a:solidFill>
                 <a:latin typeface="PT Sans"/>
               </a:rPr>
-              <a:t>3-класс ›</a:t>
+              <a:t/>
             </a:r>
           </a:p>
           <a:p>
@@ -14446,7 +14446,7 @@
                 </a:solidFill>
                 <a:latin typeface="PT Sans"/>
               </a:rPr>
-              <a:t>3-класс ›</a:t>
+              <a:t/>
             </a:r>
           </a:p>
           <a:p>
@@ -15995,7 +15995,7 @@
                 </a:solidFill>
                 <a:latin typeface="PT Sans"/>
               </a:rPr>
-              <a:t>3-класс ›</a:t>
+              <a:t/>
             </a:r>
           </a:p>
           <a:p>
@@ -17079,7 +17079,7 @@
                 </a:solidFill>
                 <a:latin typeface="PT Sans"/>
               </a:rPr>
-              <a:t>3-класс ›</a:t>
+              <a:t/>
             </a:r>
           </a:p>
           <a:p>
@@ -18609,7 +18609,7 @@
                 </a:solidFill>
                 <a:latin typeface="PT Sans"/>
               </a:rPr>
-              <a:t>3-класс ›</a:t>
+              <a:t/>
             </a:r>
           </a:p>
           <a:p>
@@ -20739,7 +20739,7 @@
                 </a:solidFill>
                 <a:latin typeface="PT Sans"/>
               </a:rPr>
-              <a:t>3-класс ›</a:t>
+              <a:t/>
             </a:r>
           </a:p>
           <a:p>
@@ -22016,7 +22016,7 @@
                 </a:solidFill>
                 <a:latin typeface="PT Sans"/>
               </a:rPr>
-              <a:t>3-класс ›</a:t>
+              <a:t/>
             </a:r>
           </a:p>
           <a:p>
@@ -23444,7 +23444,7 @@
                 </a:solidFill>
                 <a:latin typeface="PT Sans"/>
               </a:rPr>
-              <a:t>3-класс ›</a:t>
+              <a:t/>
             </a:r>
           </a:p>
           <a:p>
@@ -24900,7 +24900,7 @@
                 </a:solidFill>
                 <a:latin typeface="PT Sans"/>
               </a:rPr>
-              <a:t>3-класс ›</a:t>
+              <a:t/>
             </a:r>
           </a:p>
           <a:p>
@@ -26082,7 +26082,7 @@
                 </a:solidFill>
                 <a:latin typeface="PT Sans"/>
               </a:rPr>
-              <a:t>3-класс ›</a:t>
+              <a:t/>
             </a:r>
           </a:p>
           <a:p>
@@ -26882,7 +26882,7 @@
                 </a:solidFill>
                 <a:latin typeface="PT Sans"/>
               </a:rPr>
-              <a:t>3-класс ›</a:t>
+              <a:t/>
             </a:r>
           </a:p>
           <a:p>
@@ -27723,7 +27723,7 @@
                 </a:solidFill>
                 <a:latin typeface="PT Sans"/>
               </a:rPr>
-              <a:t>3-класс ›</a:t>
+              <a:t/>
             </a:r>
           </a:p>
           <a:p>
@@ -28672,7 +28672,7 @@
                 </a:solidFill>
                 <a:latin typeface="PT Sans"/>
               </a:rPr>
-              <a:t>3-класс ›</a:t>
+              <a:t/>
             </a:r>
           </a:p>
           <a:p>
@@ -30126,7 +30126,7 @@
                 </a:solidFill>
                 <a:latin typeface="PT Sans"/>
               </a:rPr>
-              <a:t>3-класс ›</a:t>
+              <a:t/>
             </a:r>
           </a:p>
           <a:p>
@@ -30872,7 +30872,7 @@
                 </a:solidFill>
                 <a:latin typeface="PT Sans"/>
               </a:rPr>
-              <a:t>3-класс ›</a:t>
+              <a:t/>
             </a:r>
           </a:p>
           <a:p>
@@ -31680,7 +31680,7 @@
                 </a:solidFill>
                 <a:latin typeface="PT Sans"/>
               </a:rPr>
-              <a:t>3-класс ›</a:t>
+              <a:t/>
             </a:r>
           </a:p>
           <a:p>
@@ -32871,7 +32871,7 @@
                 </a:solidFill>
                 <a:latin typeface="PT Sans"/>
               </a:rPr>
-              <a:t>3-класс ›</a:t>
+              <a:t/>
             </a:r>
           </a:p>
           <a:p>
@@ -34050,7 +34050,7 @@
                 </a:solidFill>
                 <a:latin typeface="PT Sans"/>
               </a:rPr>
-              <a:t>3-класс ›</a:t>
+              <a:t/>
             </a:r>
           </a:p>
           <a:p>
@@ -34231,7 +34231,7 @@
                 </a:solidFill>
                 <a:latin typeface="PT Sans"/>
               </a:rPr>
-              <a:t>2-класс</a:t>
+              <a:t/>
             </a:r>
           </a:p>
         </p:txBody>
@@ -34392,7 +34392,7 @@
                 </a:solidFill>
                 <a:latin typeface="PT Sans"/>
               </a:rPr>
-              <a:t>3-класс</a:t>
+              <a:t/>
             </a:r>
           </a:p>
         </p:txBody>
@@ -34628,7 +34628,7 @@
                 </a:solidFill>
                 <a:latin typeface="PT Sans"/>
               </a:rPr>
-              <a:t>4-класс</a:t>
+              <a:t/>
             </a:r>
           </a:p>
         </p:txBody>
@@ -34790,7 +34790,7 @@
                 </a:solidFill>
                 <a:latin typeface="PT Sans"/>
               </a:rPr>
-              <a:t>5-класс</a:t>
+              <a:t/>
             </a:r>
           </a:p>
         </p:txBody>
@@ -35191,7 +35191,7 @@
                 </a:solidFill>
                 <a:latin typeface="PT Sans"/>
               </a:rPr>
-              <a:t>3-класс ›</a:t>
+              <a:t/>
             </a:r>
           </a:p>
           <a:p>
@@ -36339,7 +36339,7 @@
                 </a:solidFill>
                 <a:latin typeface="PT Sans"/>
               </a:rPr>
-              <a:t>3-класс ›</a:t>
+              <a:t/>
             </a:r>
           </a:p>
           <a:p>

--- a/apps/resources/bundled_files/3-klass-sandyn-bolugu-sabak.pptx
+++ b/apps/resources/bundled_files/3-klass-sandyn-bolugu-sabak.pptx
@@ -1582,7 +1582,7 @@
           <a:lstStyle/>
           <a:p>
             <a:r>
-              <a:t>Ой жүгүртүү маданияты (Wenxi Lee, 2.6).</a:t>
+              <a:t>Ой жүгүртүү маданияты (Wenxi Lee, 2,6).</a:t>
             </a:r>
           </a:p>
         </p:txBody>
